--- a/presentation/City_Hotel_cancelaciones.pptx
+++ b/presentation/City_Hotel_cancelaciones.pptx
@@ -4639,6 +4639,10 @@
           </a:solidFill>
           <a:ln/>
         </p:spPr>
+        <p:txBody>
+          <a:bodyPr/>
+          <a:p/>
+        </p:txBody>
       </p:sp>
       <p:sp>
         <p:nvSpPr>
@@ -4848,6 +4852,14 @@
               <a:t>Dataset: Antonio, de Almeida &amp; Nunes (2019), Data in Brief — City Hotel = Lisboa, Resort = Algarve (ubicación del paper, no del CSV).</a:t>
             </a:r>
             <a:endParaRPr lang="en-US" sz="1500" dirty="0"/>
+          </a:p>
+          <a:p>
+            <a:r>
+              <a:rPr sz="1500" b="0">
+                <a:latin typeface="Calibri"/>
+              </a:rPr>
+              <a:t>Repositorio (código + análisis):  https://github.com/GonzaloData/city-hotel-cancellation-analysis-es</a:t>
+            </a:r>
           </a:p>
         </p:txBody>
       </p:sp>
